--- a/slides/AISS-Template-Showcase-v0.1.pptx
+++ b/slides/AISS-Template-Showcase-v0.1.pptx
@@ -12540,7 +12540,7 @@
                 <a:ea typeface="Roboto" pitchFamily="34" charset="-122"/>
                 <a:cs typeface="Roboto" pitchFamily="34" charset="-120"/>
               </a:rPr>
-              <a:t>jonathanmccrimmond.github.io/ai-systems-studio-template/</a:t>
+              <a:t>jonathanmccrimmond.github.io/ai-systems-studio/</a:t>
             </a:r>
             <a:endParaRPr lang="en-US" sz="950" dirty="0"/>
           </a:p>
